--- a/Resources/Templates/AB16/AB16_REL_Rev1_08112026.pptx
+++ b/Resources/Templates/AB16/AB16_REL_Rev1_08112026.pptx
@@ -231,7 +231,7 @@
           <a:p>
             <a:fld id="{5A2993FE-E9D3-4B10-B499-4235062A8B3B}" type="datetimeFigureOut">
               <a:rPr lang="en-US" smtClean="0"/>
-              <a:t>8/12/2026</a:t>
+              <a:t>8/14/2026</a:t>
             </a:fld>
             <a:endParaRPr lang="en-US"/>
           </a:p>
@@ -409,7 +409,7 @@
           <a:p>
             <a:fld id="{DD2E5E3A-6FB5-47BF-ABCF-397F6C94D529}" type="datetimeFigureOut">
               <a:rPr lang="en-US" smtClean="0"/>
-              <a:t>8/12/2026</a:t>
+              <a:t>8/14/2026</a:t>
             </a:fld>
             <a:endParaRPr lang="en-US" dirty="0"/>
           </a:p>
@@ -19762,7 +19762,7 @@
                 <a:ea typeface="Tahoma" panose="020B0604030504040204" pitchFamily="34" charset="0"/>
                 <a:cs typeface="Tahoma" panose="020B0604030504040204" pitchFamily="34" charset="0"/>
               </a:rPr>
-              <a:t>BA_VBL@annotation_front_plan</a:t>
+              <a:t>BA_SLB@annotation_front_plan</a:t>
             </a:r>
             <a:r>
               <a:rPr lang="en-US" sz="1400" dirty="0">
